--- a/slides/14_The_Aha_Moment.pptx
+++ b/slides/14_The_Aha_Moment.pptx
@@ -134,7 +134,7 @@
   <p:extLst>
     <p:ext uri="{521415D9-36F7-43E2-AB2F-B90AF26B5E84}">
       <p14:sectionLst xmlns:p14="http://schemas.microsoft.com/office/powerpoint/2010/main">
-        <p14:section name="Introduction" id="{74f787f9-9d2d-8abc-3cc7-a7883c1700a4}">
+        <p14:section name="Introduction" id="{648e6572-6a2f-0c17-df69-e442ca832e5a}">
           <p14:sldIdLst>
             <p14:sldId id="256"/>
             <p14:sldId id="257"/>
@@ -143,7 +143,7 @@
             <p14:sldId id="260"/>
           </p14:sldIdLst>
         </p14:section>
-        <p14:section name="Making one line stand out" id="{dd687acc-8fe1-a008-e74d-396121c22a45}">
+        <p14:section name="Making one line stand out" id="{15ad045b-68b9-f512-35cd-56a07969521f}">
           <p14:sldIdLst>
             <p14:sldId id="261"/>
             <p14:sldId id="262"/>
@@ -155,7 +155,7 @@
             <p14:sldId id="268"/>
           </p14:sldIdLst>
         </p14:section>
-        <p14:section name="Letting our audience explore" id="{1e210054-4d79-292f-b532-2aef75e4b5ad}">
+        <p14:section name="Letting our audience explore" id="{2792df3d-eb5b-689b-81f8-6969568b6934}">
           <p14:sldIdLst>
             <p14:sldId id="269"/>
             <p14:sldId id="270"/>
@@ -172,7 +172,7 @@
             <p14:sldId id="281"/>
           </p14:sldIdLst>
         </p14:section>
-        <p14:section name="Wrap up" id="{fe5f878c-8a79-7efb-c50d-d3233711728c}">
+        <p14:section name="Wrap up" id="{3b6e8867-a93d-136d-bdde-c55c2d9e5ca5}">
           <p14:sldIdLst>
             <p14:sldId id="282"/>
             <p14:sldId id="283"/>
@@ -4135,7 +4135,7 @@
               <a:t>Change </a:t>
             </a:r>
             <a:r>
-              <a:rPr lang="en-US" sz="1800" dirty="0">
+              <a:rPr lang="en-US" sz="1800" b="1" dirty="0">
                 <a:solidFill>
                   <a:srgbClr val="B86E1E"/>
                 </a:solidFill>
@@ -4154,7 +4154,7 @@
               <a:t> to another colour name, such as </a:t>
             </a:r>
             <a:r>
-              <a:rPr lang="en-US" sz="1800" dirty="0">
+              <a:rPr lang="en-US" sz="1800" b="1" dirty="0">
                 <a:solidFill>
                   <a:srgbClr val="B86E1E"/>
                 </a:solidFill>
@@ -4200,7 +4200,7 @@
               <a:t>Change </a:t>
             </a:r>
             <a:r>
-              <a:rPr lang="en-US" sz="1800" dirty="0">
+              <a:rPr lang="en-US" sz="1800" b="1" dirty="0">
                 <a:solidFill>
                   <a:srgbClr val="B86E1E"/>
                 </a:solidFill>
@@ -4219,7 +4219,7 @@
               <a:t> and </a:t>
             </a:r>
             <a:r>
-              <a:rPr lang="en-US" sz="1800" dirty="0">
+              <a:rPr lang="en-US" sz="1800" b="1" dirty="0">
                 <a:solidFill>
                   <a:srgbClr val="B86E1E"/>
                 </a:solidFill>
@@ -4458,7 +4458,7 @@
               <a:t>It's the median review score of the Indie games from 2018, in the </a:t>
             </a:r>
             <a:r>
-              <a:rPr lang="en-US" sz="1800" dirty="0">
+              <a:rPr lang="en-US" sz="1800" b="1" dirty="0">
                 <a:solidFill>
                   <a:srgbClr val="B86E1E"/>
                 </a:solidFill>
@@ -4477,7 +4477,7 @@
               <a:t> table. We can also hover over the 2018 point to see it. An annotation's </a:t>
             </a:r>
             <a:r>
-              <a:rPr lang="en-US" sz="1800" dirty="0">
+              <a:rPr lang="en-US" sz="1800" b="1" dirty="0">
                 <a:solidFill>
                   <a:srgbClr val="B86E1E"/>
                 </a:solidFill>
@@ -4496,7 +4496,7 @@
               <a:t> and </a:t>
             </a:r>
             <a:r>
-              <a:rPr lang="en-US" sz="1800" dirty="0">
+              <a:rPr lang="en-US" sz="1800" b="1" dirty="0">
                 <a:solidFill>
                   <a:srgbClr val="B86E1E"/>
                 </a:solidFill>
@@ -5318,7 +5318,7 @@
               <a:t>UI elements are part of the </a:t>
             </a:r>
             <a:r>
-              <a:rPr lang="en-US" sz="1300" dirty="0">
+              <a:rPr lang="en-US" sz="1300" b="1" dirty="0">
                 <a:solidFill>
                   <a:srgbClr val="B86E1E"/>
                 </a:solidFill>
@@ -5447,7 +5447,7 @@
               <a:t> → imports </a:t>
             </a:r>
             <a:r>
-              <a:rPr lang="en-US" sz="1200" dirty="0">
+              <a:rPr lang="en-US" sz="1200" b="1" dirty="0">
                 <a:solidFill>
                   <a:srgbClr val="B86E1E"/>
                 </a:solidFill>
@@ -5466,7 +5466,7 @@
               <a:t> with the short name </a:t>
             </a:r>
             <a:r>
-              <a:rPr lang="en-US" sz="1200" dirty="0">
+              <a:rPr lang="en-US" sz="1200" b="1" dirty="0">
                 <a:solidFill>
                   <a:srgbClr val="B86E1E"/>
                 </a:solidFill>
@@ -5727,7 +5727,7 @@
               <a:t>each dropdown option is a column name in </a:t>
             </a:r>
             <a:r>
-              <a:rPr lang="en-US" sz="1600" dirty="0">
+              <a:rPr lang="en-US" sz="1600" b="1" dirty="0">
                 <a:solidFill>
                   <a:srgbClr val="B86E1E"/>
                 </a:solidFill>
@@ -5772,7 +5772,7 @@
               <a:t>every UI element has a </a:t>
             </a:r>
             <a:r>
-              <a:rPr lang="en-US" sz="1600" dirty="0">
+              <a:rPr lang="en-US" sz="1600" b="1" dirty="0">
                 <a:solidFill>
                   <a:srgbClr val="B86E1E"/>
                 </a:solidFill>
@@ -5809,7 +5809,7 @@
               <a:t>​</a:t>
             </a:r>
             <a:r>
-              <a:rPr lang="en-US" sz="1600" dirty="0">
+              <a:rPr lang="en-US" sz="1600" b="1" dirty="0">
                 <a:solidFill>
                   <a:srgbClr val="B86E1E"/>
                 </a:solidFill>
@@ -5828,7 +5828,7 @@
               <a:t> is like </a:t>
             </a:r>
             <a:r>
-              <a:rPr lang="en-US" sz="1600" dirty="0">
+              <a:rPr lang="en-US" sz="1600" b="1" dirty="0">
                 <a:solidFill>
                   <a:srgbClr val="B86E1E"/>
                 </a:solidFill>
@@ -5847,7 +5847,7 @@
               <a:t>; </a:t>
             </a:r>
             <a:r>
-              <a:rPr lang="en-US" sz="1600" dirty="0">
+              <a:rPr lang="en-US" sz="1600" b="1" dirty="0">
                 <a:solidFill>
                   <a:srgbClr val="B86E1E"/>
                 </a:solidFill>
@@ -5866,7 +5866,7 @@
               <a:t> is like </a:t>
             </a:r>
             <a:r>
-              <a:rPr lang="en-US" sz="1600" dirty="0">
+              <a:rPr lang="en-US" sz="1600" b="1" dirty="0">
                 <a:solidFill>
                   <a:srgbClr val="B86E1E"/>
                 </a:solidFill>
@@ -6857,7 +6857,7 @@
               <a:t> → a range slider from 2010 to 2024, stored in </a:t>
             </a:r>
             <a:r>
-              <a:rPr lang="en-US" sz="1200" dirty="0">
+              <a:rPr lang="en-US" sz="1200" b="1" dirty="0">
                 <a:solidFill>
                   <a:srgbClr val="B86E1E"/>
                 </a:solidFill>
@@ -6936,7 +6936,7 @@
               <a:t> → a dropdown stored in </a:t>
             </a:r>
             <a:r>
-              <a:rPr lang="en-US" sz="1200" dirty="0">
+              <a:rPr lang="en-US" sz="1200" b="1" dirty="0">
                 <a:solidFill>
                   <a:srgbClr val="B86E1E"/>
                 </a:solidFill>
@@ -6955,7 +6955,7 @@
               <a:t>, starting on </a:t>
             </a:r>
             <a:r>
-              <a:rPr lang="en-US" sz="1200" dirty="0">
+              <a:rPr lang="en-US" sz="1200" b="1" dirty="0">
                 <a:solidFill>
                   <a:srgbClr val="B86E1E"/>
                 </a:solidFill>
@@ -7123,7 +7123,7 @@
               <a:t>We make a table like </a:t>
             </a:r>
             <a:r>
-              <a:rPr lang="en-US" sz="1400" dirty="0">
+              <a:rPr lang="en-US" sz="1400" b="1" dirty="0">
                 <a:solidFill>
                   <a:srgbClr val="B86E1E"/>
                 </a:solidFill>
@@ -7142,7 +7142,7 @@
               <a:t>, called </a:t>
             </a:r>
             <a:r>
-              <a:rPr lang="en-US" sz="1400" dirty="0">
+              <a:rPr lang="en-US" sz="1400" b="1" dirty="0">
                 <a:solidFill>
                   <a:srgbClr val="B86E1E"/>
                 </a:solidFill>
@@ -7255,7 +7255,7 @@
               <a:t>​</a:t>
             </a:r>
             <a:r>
-              <a:rPr lang="en-US" sz="1600" dirty="0">
+              <a:rPr lang="en-US" sz="1600" b="1" dirty="0">
                 <a:solidFill>
                   <a:srgbClr val="B86E1E"/>
                 </a:solidFill>
@@ -7308,7 +7308,7 @@
               <a:t>​</a:t>
             </a:r>
             <a:r>
-              <a:rPr lang="en-US" sz="1600" dirty="0">
+              <a:rPr lang="en-US" sz="1600" b="1" dirty="0">
                 <a:solidFill>
                   <a:srgbClr val="B86E1E"/>
                 </a:solidFill>
@@ -8171,7 +8171,7 @@
               <a:t> Line 3 uses </a:t>
             </a:r>
             <a:r>
-              <a:rPr lang="en-US" sz="1300" dirty="0">
+              <a:rPr lang="en-US" sz="1300" b="1" dirty="0">
                 <a:solidFill>
                   <a:srgbClr val="B86E1E"/>
                 </a:solidFill>
@@ -8190,7 +8190,7 @@
               <a:t> and </a:t>
             </a:r>
             <a:r>
-              <a:rPr lang="en-US" sz="1300" dirty="0">
+              <a:rPr lang="en-US" sz="1300" b="1" dirty="0">
                 <a:solidFill>
                   <a:srgbClr val="B86E1E"/>
                 </a:solidFill>
@@ -8209,7 +8209,7 @@
               <a:t>; line 6 uses </a:t>
             </a:r>
             <a:r>
-              <a:rPr lang="en-US" sz="1300" dirty="0">
+              <a:rPr lang="en-US" sz="1300" b="1" dirty="0">
                 <a:solidFill>
                   <a:srgbClr val="B86E1E"/>
                 </a:solidFill>
@@ -8386,7 +8386,7 @@
               <a:t>the slider and dropdown appear, with the </a:t>
             </a:r>
             <a:r>
-              <a:rPr lang="en-US" sz="1800" dirty="0">
+              <a:rPr lang="en-US" sz="1800" b="1" dirty="0">
                 <a:solidFill>
                   <a:srgbClr val="B86E1E"/>
                 </a:solidFill>
@@ -8507,7 +8507,7 @@
               <a:t>: when </a:t>
             </a:r>
             <a:r>
-              <a:rPr lang="en-US" sz="1800" dirty="0">
+              <a:rPr lang="en-US" sz="1800" b="1" dirty="0">
                 <a:solidFill>
                   <a:srgbClr val="B86E1E"/>
                 </a:solidFill>
@@ -9749,7 +9749,7 @@
               <a:t>Add </a:t>
             </a:r>
             <a:r>
-              <a:rPr lang="en-US" sz="1800" dirty="0">
+              <a:rPr lang="en-US" sz="1800" b="1" dirty="0">
                 <a:solidFill>
                   <a:srgbClr val="B86E1E"/>
                 </a:solidFill>
@@ -10950,7 +10950,7 @@
               <a:t>Why do we store the chart in </a:t>
             </a:r>
             <a:r>
-              <a:rPr lang="en-US" sz="1800" dirty="0">
+              <a:rPr lang="en-US" sz="1800" b="1" dirty="0">
                 <a:solidFill>
                   <a:srgbClr val="E8A55A"/>
                 </a:solidFill>
@@ -11023,7 +11023,7 @@
               <a:t>What is </a:t>
             </a:r>
             <a:r>
-              <a:rPr lang="en-US" sz="1800" dirty="0">
+              <a:rPr lang="en-US" sz="1800" b="1" dirty="0">
                 <a:solidFill>
                   <a:srgbClr val="E8A55A"/>
                 </a:solidFill>
@@ -12995,7 +12995,7 @@
               <a:t>We make the chart the same way as before, and store it in </a:t>
             </a:r>
             <a:r>
-              <a:rPr lang="en-US" sz="1400" dirty="0">
+              <a:rPr lang="en-US" sz="1400" b="1" dirty="0">
                 <a:solidFill>
                   <a:srgbClr val="B86E1E"/>
                 </a:solidFill>
@@ -13056,7 +13056,7 @@
               <a:t>​</a:t>
             </a:r>
             <a:r>
-              <a:rPr lang="en-US" sz="1800" dirty="0">
+              <a:rPr lang="en-US" sz="1800" b="1" dirty="0">
                 <a:solidFill>
                   <a:srgbClr val="B86E1E"/>
                 </a:solidFill>
@@ -13093,7 +13093,7 @@
               <a:t>​</a:t>
             </a:r>
             <a:r>
-              <a:rPr lang="en-US" sz="1800" dirty="0">
+              <a:rPr lang="en-US" sz="1800" b="1" dirty="0">
                 <a:solidFill>
                   <a:srgbClr val="B86E1E"/>
                 </a:solidFill>
@@ -13130,7 +13130,7 @@
               <a:t>​</a:t>
             </a:r>
             <a:r>
-              <a:rPr lang="en-US" sz="1800" dirty="0">
+              <a:rPr lang="en-US" sz="1800" b="1" dirty="0">
                 <a:solidFill>
                   <a:srgbClr val="B86E1E"/>
                 </a:solidFill>
